--- a/PPTs/Midterm Exam ANS.pptx
+++ b/PPTs/Midterm Exam ANS.pptx
@@ -7462,88 +7462,6 @@
       </p:grpSp>
       <p:sp>
         <p:nvSpPr>
-          <p:cNvPr id="5" name="Oval 4">
-            <a:extLst>
-              <a:ext uri="{FF2B5EF4-FFF2-40B4-BE49-F238E27FC236}">
-                <a16:creationId xmlns:a16="http://schemas.microsoft.com/office/drawing/2014/main" id="{985A59C8-7B76-7AD2-A05F-5501DC9A6F3D}"/>
-              </a:ext>
-            </a:extLst>
-          </p:cNvPr>
-          <p:cNvSpPr/>
-          <p:nvPr/>
-        </p:nvSpPr>
-        <p:spPr bwMode="auto">
-          <a:xfrm>
-            <a:off x="228600" y="4396630"/>
-            <a:ext cx="67420" cy="67420"/>
-          </a:xfrm>
-          <a:prstGeom prst="ellipse">
-            <a:avLst/>
-          </a:prstGeom>
-          <a:solidFill>
-            <a:schemeClr val="bg1"/>
-          </a:solidFill>
-          <a:ln w="19050" cap="flat" cmpd="sng" algn="ctr">
-            <a:solidFill>
-              <a:schemeClr val="tx1"/>
-            </a:solidFill>
-            <a:prstDash val="solid"/>
-            <a:round/>
-            <a:headEnd type="none" w="med" len="med"/>
-            <a:tailEnd type="none" w="med" len="med"/>
-          </a:ln>
-          <a:effectLst/>
-          <a:extLst>
-            <a:ext uri="{AF507438-7753-43e0-B8FC-AC1667EBCBE1}">
-              <a14:hiddenEffects xmlns="" xmlns:a14="http://schemas.microsoft.com/office/drawing/2010/main">
-                <a:effectLst>
-                  <a:outerShdw dist="35921" dir="2700000" algn="ctr" rotWithShape="0">
-                    <a:schemeClr val="bg2"/>
-                  </a:outerShdw>
-                </a:effectLst>
-              </a14:hiddenEffects>
-            </a:ext>
-          </a:extLst>
-        </p:spPr>
-        <p:txBody>
-          <a:bodyPr vert="horz" wrap="square" lIns="91440" tIns="45720" rIns="91440" bIns="45720" numCol="1" rtlCol="0" anchor="t" anchorCtr="0" compatLnSpc="1">
-            <a:prstTxWarp prst="textNoShape">
-              <a:avLst/>
-            </a:prstTxWarp>
-          </a:bodyPr>
-          <a:lstStyle/>
-          <a:p>
-            <a:pPr marL="0" marR="0" indent="0" algn="l" defTabSz="914400" rtl="0" eaLnBrk="0" fontAlgn="base" latinLnBrk="0" hangingPunct="0">
-              <a:lnSpc>
-                <a:spcPct val="100000"/>
-              </a:lnSpc>
-              <a:spcBef>
-                <a:spcPct val="0"/>
-              </a:spcBef>
-              <a:spcAft>
-                <a:spcPct val="0"/>
-              </a:spcAft>
-              <a:buClrTx/>
-              <a:buSzTx/>
-              <a:buFontTx/>
-              <a:buNone/>
-              <a:tabLst/>
-            </a:pPr>
-            <a:endParaRPr kumimoji="0" lang="en-SE" sz="1800" b="1" i="0" u="none" strike="noStrike" cap="none" normalizeH="0" baseline="0" dirty="0">
-              <a:ln>
-                <a:noFill/>
-              </a:ln>
-              <a:solidFill>
-                <a:schemeClr val="tx1"/>
-              </a:solidFill>
-              <a:effectLst/>
-              <a:latin typeface="Gill Sans Light"/>
-            </a:endParaRPr>
-          </a:p>
-        </p:txBody>
-      </p:sp>
-      <p:sp>
-        <p:nvSpPr>
           <p:cNvPr id="53" name="Rectangle 52">
             <a:extLst>
               <a:ext uri="{FF2B5EF4-FFF2-40B4-BE49-F238E27FC236}">
@@ -8846,7 +8764,7 @@
         </p:nvSpPr>
         <p:spPr>
           <a:xfrm>
-            <a:off x="2971800" y="5450474"/>
+            <a:off x="2300000" y="5450474"/>
             <a:ext cx="3377848" cy="400110"/>
           </a:xfrm>
           <a:prstGeom prst="rect">
@@ -11637,7 +11555,7 @@
                       <a:pPr algn="ctr"/>
                       <a:r>
                         <a:rPr lang="en-GB" sz="2000" dirty="0"/>
-                        <a:t>0</a:t>
+                        <a:t>1</a:t>
                       </a:r>
                       <a:endParaRPr lang="en-SE" sz="2000" dirty="0"/>
                     </a:p>
@@ -11868,7 +11786,7 @@
           <a:p>
             <a:r>
               <a:rPr lang="en-GB" dirty="0"/>
-              <a:t>Scheduling with Bursts</a:t>
+              <a:t>Scheduling with Bursts I</a:t>
             </a:r>
             <a:endParaRPr lang="en-SE" dirty="0"/>
           </a:p>
@@ -11904,7 +11822,7 @@
           <a:p>
             <a:r>
               <a:rPr lang="en-GB" dirty="0"/>
-              <a:t>*** Consider the set of 3 processes whose arrival time and CPU/IO burst times are given below. For each scheduling algorithm (FCFS, SJF, SRTF, RR, Fixed-Priority (FP)), draw the Gantt chart by filling in the table with the PID that runs in each time slot, and calculate the response time for each process, and the average response time. For FP scheduling, assign P2 (PID 2) higher priority than P1 (PID 1). If a time slot is idle with no active process executing, then fill in X. (Except for any possible idle time slots at the end of schedule, leave them empty and do not fill in X.)</a:t>
+              <a:t>*** Consider the set of 2 processes whose arrival time and CPU/IO burst times are given below. For each scheduling algorithm (FCFS, SJF, SRTF, RR, Fixed-Priority (FP)), draw the Gantt chart by filling in the table with the PID that runs in each time slot, and calculate the response time for each process, and the average response time. For FP scheduling, assign P2 (PID 2) higher priority than P1 (PID 1). If a time slot is idle with no active process executing, then fill in X. (Except for any possible idle time slots at the end of schedule, leave them empty and do not fill in X.)</a:t>
             </a:r>
             <a:endParaRPr lang="en-SE" dirty="0"/>
           </a:p>
@@ -13115,31 +13033,9 @@
           <a:bodyPr/>
           <a:lstStyle/>
           <a:p>
-            <a:endParaRPr lang="en-SE"/>
-          </a:p>
-        </p:txBody>
-      </p:sp>
-      <p:sp>
-        <p:nvSpPr>
-          <p:cNvPr id="3" name="Content Placeholder 2">
-            <a:extLst>
-              <a:ext uri="{FF2B5EF4-FFF2-40B4-BE49-F238E27FC236}">
-                <a16:creationId xmlns:a16="http://schemas.microsoft.com/office/drawing/2014/main" id="{E93DD9E9-7FDE-DB6D-37D1-1CE2385B7CC4}"/>
-              </a:ext>
-            </a:extLst>
-          </p:cNvPr>
-          <p:cNvSpPr>
-            <a:spLocks noGrp="1"/>
-          </p:cNvSpPr>
-          <p:nvPr>
-            <p:ph idx="1"/>
-          </p:nvPr>
-        </p:nvSpPr>
-        <p:spPr/>
-        <p:txBody>
-          <a:bodyPr/>
-          <a:lstStyle/>
-          <a:p>
+            <a:r>
+              <a:t>Scheduling with Bursts I: Gantt Chart</a:t>
+            </a:r>
             <a:endParaRPr lang="en-SE"/>
           </a:p>
         </p:txBody>
@@ -14931,7 +14827,7 @@
           <a:p>
             <a:r>
               <a:rPr lang="en-GB" dirty="0"/>
-              <a:t>Scheduling with Bursts ANS</a:t>
+              <a:t>Scheduling with Bursts I ANS</a:t>
             </a:r>
             <a:endParaRPr lang="en-SE" dirty="0"/>
           </a:p>
@@ -15745,22 +15641,22 @@
                       <a:pPr algn="ctr"/>
                       <a:r>
                         <a:rPr lang="en-GB" dirty="0"/>
+                        <a:t>2</a:t>
+                      </a:r>
+                      <a:endParaRPr lang="en-SE" dirty="0"/>
+                    </a:p>
+                  </a:txBody>
+                  <a:tcPr/>
+                </a:tc>
+                <a:tc>
+                  <a:txBody>
+                    <a:bodyPr/>
+                    <a:lstStyle/>
+                    <a:p>
+                      <a:pPr algn="ctr"/>
+                      <a:r>
+                        <a:rPr lang="en-GB" dirty="0"/>
                         <a:t>1</a:t>
-                      </a:r>
-                      <a:endParaRPr lang="en-SE" dirty="0"/>
-                    </a:p>
-                  </a:txBody>
-                  <a:tcPr/>
-                </a:tc>
-                <a:tc>
-                  <a:txBody>
-                    <a:bodyPr/>
-                    <a:lstStyle/>
-                    <a:p>
-                      <a:pPr algn="ctr"/>
-                      <a:r>
-                        <a:rPr lang="en-GB" dirty="0"/>
-                        <a:t>2</a:t>
                       </a:r>
                       <a:endParaRPr lang="en-SE" dirty="0"/>
                     </a:p>
@@ -17739,7 +17635,7 @@
                             <a:schemeClr val="tx1"/>
                           </a:solidFill>
                         </a:rPr>
-                        <a:t>11</a:t>
+                        <a:t>10</a:t>
                       </a:r>
                     </a:p>
                   </a:txBody>
@@ -17757,7 +17653,7 @@
                             <a:schemeClr val="tx1"/>
                           </a:solidFill>
                         </a:rPr>
-                        <a:t>11</a:t>
+                        <a:t>10</a:t>
                       </a:r>
                     </a:p>
                   </a:txBody>
@@ -17775,7 +17671,7 @@
                             <a:schemeClr val="tx1"/>
                           </a:solidFill>
                         </a:rPr>
-                        <a:t>6</a:t>
+                        <a:t>5</a:t>
                       </a:r>
                     </a:p>
                   </a:txBody>
@@ -17793,7 +17689,7 @@
                             <a:schemeClr val="tx1"/>
                           </a:solidFill>
                         </a:rPr>
-                        <a:t>7</a:t>
+                        <a:t>5</a:t>
                       </a:r>
                     </a:p>
                   </a:txBody>
@@ -17811,7 +17707,7 @@
                             <a:schemeClr val="tx1"/>
                           </a:solidFill>
                         </a:rPr>
-                        <a:t>6</a:t>
+                        <a:t>5</a:t>
                       </a:r>
                     </a:p>
                   </a:txBody>
@@ -17954,7 +17850,7 @@
                             <a:schemeClr val="tx1"/>
                           </a:solidFill>
                         </a:rPr>
-                        <a:t>10</a:t>
+                        <a:t>9.5</a:t>
                       </a:r>
                     </a:p>
                   </a:txBody>
@@ -18015,7 +17911,7 @@
                             <a:schemeClr val="tx1"/>
                           </a:solidFill>
                         </a:rPr>
-                        <a:t>10</a:t>
+                        <a:t>9.5</a:t>
                       </a:r>
                     </a:p>
                   </a:txBody>
@@ -18060,7 +17956,7 @@
                             <a:schemeClr val="tx1"/>
                           </a:solidFill>
                         </a:rPr>
-                        <a:t>8</a:t>
+                        <a:t>7.5</a:t>
                       </a:r>
                     </a:p>
                   </a:txBody>
@@ -18105,7 +18001,7 @@
                             <a:schemeClr val="tx1"/>
                           </a:solidFill>
                         </a:rPr>
-                        <a:t>8.5</a:t>
+                        <a:t>7.5</a:t>
                       </a:r>
                     </a:p>
                   </a:txBody>
@@ -18150,7 +18046,7 @@
                             <a:schemeClr val="tx1"/>
                           </a:solidFill>
                         </a:rPr>
-                        <a:t>8</a:t>
+                        <a:t>7.5</a:t>
                       </a:r>
                     </a:p>
                   </a:txBody>
@@ -18262,7 +18158,7 @@
           <a:p>
             <a:r>
               <a:rPr lang="en-GB" dirty="0"/>
-              <a:t>*** Consider the set of 3 processes whose arrival time and CPU/IO burst times are given below. For each scheduling algorithm (FCFS, SJF, SRTF, RR, Fixed-Priority (FP)), draw the Gantt chart by filling in the table with the PID that runs in each time slot, and calculate the response time for each process, and the average response time. For FP scheduling, assign P2 (PID 2) higher priority than P1 (PID 1). If a time slot is idle with no active process executing, then fill in X. (Except for any possible idle time slots at the end of schedule, leave them empty and do not fill in X.)</a:t>
+              <a:t>*** Consider the set of 2 processes whose arrival time and CPU/IO burst times are given below. For each scheduling algorithm (FCFS, SJF, SRTF, RR, Fixed-Priority (FP)), draw the Gantt chart by filling in the table with the PID that runs in each time slot, and calculate the response time for each process, and the average response time. For FP scheduling, assign P2 (PID 2) higher priority than P1 (PID 1). If a time slot is idle with no active process executing, then fill in X. (Except for any possible idle time slots at the end of schedule, leave them empty and do not fill in X.)</a:t>
             </a:r>
             <a:endParaRPr lang="en-SE" dirty="0"/>
           </a:p>
@@ -22176,7 +22072,7 @@
                             <a:schemeClr val="tx1"/>
                           </a:solidFill>
                         </a:rPr>
-                        <a:t>10</a:t>
+                        <a:t>12</a:t>
                       </a:r>
                     </a:p>
                   </a:txBody>
@@ -22194,7 +22090,7 @@
                             <a:schemeClr val="tx1"/>
                           </a:solidFill>
                         </a:rPr>
-                        <a:t>10</a:t>
+                        <a:t>12</a:t>
                       </a:r>
                     </a:p>
                   </a:txBody>
@@ -22212,7 +22108,7 @@
                             <a:schemeClr val="tx1"/>
                           </a:solidFill>
                         </a:rPr>
-                        <a:t>10</a:t>
+                        <a:t>12</a:t>
                       </a:r>
                     </a:p>
                   </a:txBody>
@@ -22399,7 +22295,25 @@
                             <a:schemeClr val="tx1"/>
                           </a:solidFill>
                         </a:rPr>
-                        <a:t>6</a:t>
+                        <a:t>7</a:t>
+                      </a:r>
+                    </a:p>
+                  </a:txBody>
+                  <a:tcPr/>
+                </a:tc>
+                <a:tc>
+                  <a:txBody>
+                    <a:bodyPr/>
+                    <a:lstStyle/>
+                    <a:p>
+                      <a:pPr algn="r"/>
+                      <a:r>
+                        <a:rPr lang="en-US" dirty="0">
+                          <a:solidFill>
+                            <a:schemeClr val="tx1"/>
+                          </a:solidFill>
+                        </a:rPr>
+                        <a:t>9</a:t>
                       </a:r>
                     </a:p>
                   </a:txBody>
@@ -22418,24 +22332,6 @@
                           </a:solidFill>
                         </a:rPr>
                         <a:t>7</a:t>
-                      </a:r>
-                    </a:p>
-                  </a:txBody>
-                  <a:tcPr/>
-                </a:tc>
-                <a:tc>
-                  <a:txBody>
-                    <a:bodyPr/>
-                    <a:lstStyle/>
-                    <a:p>
-                      <a:pPr algn="r"/>
-                      <a:r>
-                        <a:rPr lang="en-US" dirty="0">
-                          <a:solidFill>
-                            <a:schemeClr val="tx1"/>
-                          </a:solidFill>
-                        </a:rPr>
-                        <a:t>6</a:t>
                       </a:r>
                     </a:p>
                   </a:txBody>
@@ -22684,7 +22580,7 @@
                             <a:schemeClr val="tx1"/>
                           </a:solidFill>
                         </a:rPr>
-                        <a:t>8</a:t>
+                        <a:t>9.5</a:t>
                       </a:r>
                     </a:p>
                   </a:txBody>
@@ -22729,7 +22625,7 @@
                             <a:schemeClr val="tx1"/>
                           </a:solidFill>
                         </a:rPr>
-                        <a:t>8.5</a:t>
+                        <a:t>10.5</a:t>
                       </a:r>
                     </a:p>
                   </a:txBody>
@@ -22774,7 +22670,7 @@
                             <a:schemeClr val="tx1"/>
                           </a:solidFill>
                         </a:rPr>
-                        <a:t>8</a:t>
+                        <a:t>9.5</a:t>
                       </a:r>
                     </a:p>
                   </a:txBody>
